--- a/docs/slides/01_floor_ceiling.pptx
+++ b/docs/slides/01_floor_ceiling.pptx
@@ -5,9 +5,9 @@
     <p:sldMasterId id="2147483648" r:id="rId1"/>
   </p:sldMasterIdLst>
   <p:sldIdLst>
-    <p:sldId id="256" r:id="rId7"/>
+    <p:sldId id="256" r:id="rId2"/>
   </p:sldIdLst>
-  <p:sldSz cx="12193200" cy="6858000" type="screen4x3"/>
+  <p:sldSz cx="12193588" cy="6858000"/>
   <p:notesSz cx="6858000" cy="9144000"/>
   <p:defaultTextStyle>
     <a:defPPr>
@@ -104,6 +104,22 @@
       </a:defRPr>
     </a:lvl9pPr>
   </p:defaultTextStyle>
+  <p:extLst>
+    <p:ext uri="{EFAFB233-063F-42B5-8137-9DF3F51BA10A}">
+      <p15:sldGuideLst xmlns:p15="http://schemas.microsoft.com/office/powerpoint/2012/main">
+        <p15:guide id="1" orient="horz" pos="2160">
+          <p15:clr>
+            <a:srgbClr val="A4A3A4"/>
+          </p15:clr>
+        </p15:guide>
+        <p15:guide id="2" pos="2880">
+          <p15:clr>
+            <a:srgbClr val="A4A3A4"/>
+          </p15:clr>
+        </p15:guide>
+      </p15:sldGuideLst>
+    </p:ext>
+  </p:extLst>
 </p:presentation>
 </file>
 
@@ -145,10 +161,9 @@
           <a:lstStyle/>
           <a:p>
             <a:r>
-              <a:rPr lang="en-US" smtClean="0"/>
+              <a:rPr lang="en-US"/>
               <a:t>Click to edit Master title style</a:t>
             </a:r>
-            <a:endParaRPr lang="en-US"/>
           </a:p>
         </p:txBody>
       </p:sp>
@@ -264,10 +279,9 @@
           </a:lstStyle>
           <a:p>
             <a:r>
-              <a:rPr lang="en-US" smtClean="0"/>
+              <a:rPr lang="en-US"/>
               <a:t>Click to edit Master subtitle style</a:t>
             </a:r>
-            <a:endParaRPr lang="en-US"/>
           </a:p>
         </p:txBody>
       </p:sp>
@@ -288,7 +302,7 @@
           <a:p>
             <a:fld id="{5BCAD085-E8A6-8845-BD4E-CB4CCA059FC4}" type="datetimeFigureOut">
               <a:rPr lang="en-US" smtClean="0"/>
-              <a:t>1/27/13</a:t>
+              <a:t>10/29/2026</a:t>
             </a:fld>
             <a:endParaRPr lang="en-US"/>
           </a:p>
@@ -382,10 +396,9 @@
           <a:lstStyle/>
           <a:p>
             <a:r>
-              <a:rPr lang="en-US" smtClean="0"/>
+              <a:rPr lang="en-US"/>
               <a:t>Click to edit Master title style</a:t>
             </a:r>
-            <a:endParaRPr lang="en-US"/>
           </a:p>
         </p:txBody>
       </p:sp>
@@ -406,38 +419,37 @@
           <a:p>
             <a:pPr lvl="0"/>
             <a:r>
-              <a:rPr lang="en-US" smtClean="0"/>
+              <a:rPr lang="en-US"/>
               <a:t>Click to edit Master text styles</a:t>
             </a:r>
           </a:p>
           <a:p>
             <a:pPr lvl="1"/>
             <a:r>
-              <a:rPr lang="en-US" smtClean="0"/>
+              <a:rPr lang="en-US"/>
               <a:t>Second level</a:t>
             </a:r>
           </a:p>
           <a:p>
             <a:pPr lvl="2"/>
             <a:r>
-              <a:rPr lang="en-US" smtClean="0"/>
+              <a:rPr lang="en-US"/>
               <a:t>Third level</a:t>
             </a:r>
           </a:p>
           <a:p>
             <a:pPr lvl="3"/>
             <a:r>
-              <a:rPr lang="en-US" smtClean="0"/>
+              <a:rPr lang="en-US"/>
               <a:t>Fourth level</a:t>
             </a:r>
           </a:p>
           <a:p>
             <a:pPr lvl="4"/>
             <a:r>
-              <a:rPr lang="en-US" smtClean="0"/>
+              <a:rPr lang="en-US"/>
               <a:t>Fifth level</a:t>
             </a:r>
-            <a:endParaRPr lang="en-US"/>
           </a:p>
         </p:txBody>
       </p:sp>
@@ -458,7 +470,7 @@
           <a:p>
             <a:fld id="{5BCAD085-E8A6-8845-BD4E-CB4CCA059FC4}" type="datetimeFigureOut">
               <a:rPr lang="en-US" smtClean="0"/>
-              <a:t>1/27/13</a:t>
+              <a:t>10/29/2026</a:t>
             </a:fld>
             <a:endParaRPr lang="en-US"/>
           </a:p>
@@ -557,10 +569,9 @@
           <a:lstStyle/>
           <a:p>
             <a:r>
-              <a:rPr lang="en-US" smtClean="0"/>
+              <a:rPr lang="en-US"/>
               <a:t>Click to edit Master title style</a:t>
             </a:r>
-            <a:endParaRPr lang="en-US"/>
           </a:p>
         </p:txBody>
       </p:sp>
@@ -586,38 +597,37 @@
           <a:p>
             <a:pPr lvl="0"/>
             <a:r>
-              <a:rPr lang="en-US" smtClean="0"/>
+              <a:rPr lang="en-US"/>
               <a:t>Click to edit Master text styles</a:t>
             </a:r>
           </a:p>
           <a:p>
             <a:pPr lvl="1"/>
             <a:r>
-              <a:rPr lang="en-US" smtClean="0"/>
+              <a:rPr lang="en-US"/>
               <a:t>Second level</a:t>
             </a:r>
           </a:p>
           <a:p>
             <a:pPr lvl="2"/>
             <a:r>
-              <a:rPr lang="en-US" smtClean="0"/>
+              <a:rPr lang="en-US"/>
               <a:t>Third level</a:t>
             </a:r>
           </a:p>
           <a:p>
             <a:pPr lvl="3"/>
             <a:r>
-              <a:rPr lang="en-US" smtClean="0"/>
+              <a:rPr lang="en-US"/>
               <a:t>Fourth level</a:t>
             </a:r>
           </a:p>
           <a:p>
             <a:pPr lvl="4"/>
             <a:r>
-              <a:rPr lang="en-US" smtClean="0"/>
+              <a:rPr lang="en-US"/>
               <a:t>Fifth level</a:t>
             </a:r>
-            <a:endParaRPr lang="en-US"/>
           </a:p>
         </p:txBody>
       </p:sp>
@@ -638,7 +648,7 @@
           <a:p>
             <a:fld id="{5BCAD085-E8A6-8845-BD4E-CB4CCA059FC4}" type="datetimeFigureOut">
               <a:rPr lang="en-US" smtClean="0"/>
-              <a:t>1/27/13</a:t>
+              <a:t>10/29/2026</a:t>
             </a:fld>
             <a:endParaRPr lang="en-US"/>
           </a:p>
@@ -732,10 +742,9 @@
           <a:lstStyle/>
           <a:p>
             <a:r>
-              <a:rPr lang="en-US" smtClean="0"/>
+              <a:rPr lang="en-US"/>
               <a:t>Click to edit Master title style</a:t>
             </a:r>
-            <a:endParaRPr lang="en-US"/>
           </a:p>
         </p:txBody>
       </p:sp>
@@ -756,38 +765,37 @@
           <a:p>
             <a:pPr lvl="0"/>
             <a:r>
-              <a:rPr lang="en-US" smtClean="0"/>
+              <a:rPr lang="en-US"/>
               <a:t>Click to edit Master text styles</a:t>
             </a:r>
           </a:p>
           <a:p>
             <a:pPr lvl="1"/>
             <a:r>
-              <a:rPr lang="en-US" smtClean="0"/>
+              <a:rPr lang="en-US"/>
               <a:t>Second level</a:t>
             </a:r>
           </a:p>
           <a:p>
             <a:pPr lvl="2"/>
             <a:r>
-              <a:rPr lang="en-US" smtClean="0"/>
+              <a:rPr lang="en-US"/>
               <a:t>Third level</a:t>
             </a:r>
           </a:p>
           <a:p>
             <a:pPr lvl="3"/>
             <a:r>
-              <a:rPr lang="en-US" smtClean="0"/>
+              <a:rPr lang="en-US"/>
               <a:t>Fourth level</a:t>
             </a:r>
           </a:p>
           <a:p>
             <a:pPr lvl="4"/>
             <a:r>
-              <a:rPr lang="en-US" smtClean="0"/>
+              <a:rPr lang="en-US"/>
               <a:t>Fifth level</a:t>
             </a:r>
-            <a:endParaRPr lang="en-US"/>
           </a:p>
         </p:txBody>
       </p:sp>
@@ -808,7 +816,7 @@
           <a:p>
             <a:fld id="{5BCAD085-E8A6-8845-BD4E-CB4CCA059FC4}" type="datetimeFigureOut">
               <a:rPr lang="en-US" smtClean="0"/>
-              <a:t>1/27/13</a:t>
+              <a:t>10/29/2026</a:t>
             </a:fld>
             <a:endParaRPr lang="en-US"/>
           </a:p>
@@ -911,10 +919,9 @@
           </a:lstStyle>
           <a:p>
             <a:r>
-              <a:rPr lang="en-US" smtClean="0"/>
+              <a:rPr lang="en-US"/>
               <a:t>Click to edit Master title style</a:t>
             </a:r>
-            <a:endParaRPr lang="en-US"/>
           </a:p>
         </p:txBody>
       </p:sp>
@@ -1031,7 +1038,7 @@
           <a:p>
             <a:pPr lvl="0"/>
             <a:r>
-              <a:rPr lang="en-US" smtClean="0"/>
+              <a:rPr lang="en-US"/>
               <a:t>Click to edit Master text styles</a:t>
             </a:r>
           </a:p>
@@ -1054,7 +1061,7 @@
           <a:p>
             <a:fld id="{5BCAD085-E8A6-8845-BD4E-CB4CCA059FC4}" type="datetimeFigureOut">
               <a:rPr lang="en-US" smtClean="0"/>
-              <a:t>1/27/13</a:t>
+              <a:t>10/29/2026</a:t>
             </a:fld>
             <a:endParaRPr lang="en-US"/>
           </a:p>
@@ -1148,10 +1155,9 @@
           <a:lstStyle/>
           <a:p>
             <a:r>
-              <a:rPr lang="en-US" smtClean="0"/>
+              <a:rPr lang="en-US"/>
               <a:t>Click to edit Master title style</a:t>
             </a:r>
-            <a:endParaRPr lang="en-US"/>
           </a:p>
         </p:txBody>
       </p:sp>
@@ -1205,38 +1211,37 @@
           <a:p>
             <a:pPr lvl="0"/>
             <a:r>
-              <a:rPr lang="en-US" smtClean="0"/>
+              <a:rPr lang="en-US"/>
               <a:t>Click to edit Master text styles</a:t>
             </a:r>
           </a:p>
           <a:p>
             <a:pPr lvl="1"/>
             <a:r>
-              <a:rPr lang="en-US" smtClean="0"/>
+              <a:rPr lang="en-US"/>
               <a:t>Second level</a:t>
             </a:r>
           </a:p>
           <a:p>
             <a:pPr lvl="2"/>
             <a:r>
-              <a:rPr lang="en-US" smtClean="0"/>
+              <a:rPr lang="en-US"/>
               <a:t>Third level</a:t>
             </a:r>
           </a:p>
           <a:p>
             <a:pPr lvl="3"/>
             <a:r>
-              <a:rPr lang="en-US" smtClean="0"/>
+              <a:rPr lang="en-US"/>
               <a:t>Fourth level</a:t>
             </a:r>
           </a:p>
           <a:p>
             <a:pPr lvl="4"/>
             <a:r>
-              <a:rPr lang="en-US" smtClean="0"/>
+              <a:rPr lang="en-US"/>
               <a:t>Fifth level</a:t>
             </a:r>
-            <a:endParaRPr lang="en-US"/>
           </a:p>
         </p:txBody>
       </p:sp>
@@ -1290,38 +1295,37 @@
           <a:p>
             <a:pPr lvl="0"/>
             <a:r>
-              <a:rPr lang="en-US" smtClean="0"/>
+              <a:rPr lang="en-US"/>
               <a:t>Click to edit Master text styles</a:t>
             </a:r>
           </a:p>
           <a:p>
             <a:pPr lvl="1"/>
             <a:r>
-              <a:rPr lang="en-US" smtClean="0"/>
+              <a:rPr lang="en-US"/>
               <a:t>Second level</a:t>
             </a:r>
           </a:p>
           <a:p>
             <a:pPr lvl="2"/>
             <a:r>
-              <a:rPr lang="en-US" smtClean="0"/>
+              <a:rPr lang="en-US"/>
               <a:t>Third level</a:t>
             </a:r>
           </a:p>
           <a:p>
             <a:pPr lvl="3"/>
             <a:r>
-              <a:rPr lang="en-US" smtClean="0"/>
+              <a:rPr lang="en-US"/>
               <a:t>Fourth level</a:t>
             </a:r>
           </a:p>
           <a:p>
             <a:pPr lvl="4"/>
             <a:r>
-              <a:rPr lang="en-US" smtClean="0"/>
+              <a:rPr lang="en-US"/>
               <a:t>Fifth level</a:t>
             </a:r>
-            <a:endParaRPr lang="en-US"/>
           </a:p>
         </p:txBody>
       </p:sp>
@@ -1342,7 +1346,7 @@
           <a:p>
             <a:fld id="{5BCAD085-E8A6-8845-BD4E-CB4CCA059FC4}" type="datetimeFigureOut">
               <a:rPr lang="en-US" smtClean="0"/>
-              <a:t>1/27/13</a:t>
+              <a:t>10/29/2026</a:t>
             </a:fld>
             <a:endParaRPr lang="en-US"/>
           </a:p>
@@ -1440,10 +1444,9 @@
           </a:lstStyle>
           <a:p>
             <a:r>
-              <a:rPr lang="en-US" smtClean="0"/>
+              <a:rPr lang="en-US"/>
               <a:t>Click to edit Master title style</a:t>
             </a:r>
-            <a:endParaRPr lang="en-US"/>
           </a:p>
         </p:txBody>
       </p:sp>
@@ -1506,7 +1509,7 @@
           <a:p>
             <a:pPr lvl="0"/>
             <a:r>
-              <a:rPr lang="en-US" smtClean="0"/>
+              <a:rPr lang="en-US"/>
               <a:t>Click to edit Master text styles</a:t>
             </a:r>
           </a:p>
@@ -1562,38 +1565,37 @@
           <a:p>
             <a:pPr lvl="0"/>
             <a:r>
-              <a:rPr lang="en-US" smtClean="0"/>
+              <a:rPr lang="en-US"/>
               <a:t>Click to edit Master text styles</a:t>
             </a:r>
           </a:p>
           <a:p>
             <a:pPr lvl="1"/>
             <a:r>
-              <a:rPr lang="en-US" smtClean="0"/>
+              <a:rPr lang="en-US"/>
               <a:t>Second level</a:t>
             </a:r>
           </a:p>
           <a:p>
             <a:pPr lvl="2"/>
             <a:r>
-              <a:rPr lang="en-US" smtClean="0"/>
+              <a:rPr lang="en-US"/>
               <a:t>Third level</a:t>
             </a:r>
           </a:p>
           <a:p>
             <a:pPr lvl="3"/>
             <a:r>
-              <a:rPr lang="en-US" smtClean="0"/>
+              <a:rPr lang="en-US"/>
               <a:t>Fourth level</a:t>
             </a:r>
           </a:p>
           <a:p>
             <a:pPr lvl="4"/>
             <a:r>
-              <a:rPr lang="en-US" smtClean="0"/>
+              <a:rPr lang="en-US"/>
               <a:t>Fifth level</a:t>
             </a:r>
-            <a:endParaRPr lang="en-US"/>
           </a:p>
         </p:txBody>
       </p:sp>
@@ -1656,7 +1658,7 @@
           <a:p>
             <a:pPr lvl="0"/>
             <a:r>
-              <a:rPr lang="en-US" smtClean="0"/>
+              <a:rPr lang="en-US"/>
               <a:t>Click to edit Master text styles</a:t>
             </a:r>
           </a:p>
@@ -1712,38 +1714,37 @@
           <a:p>
             <a:pPr lvl="0"/>
             <a:r>
-              <a:rPr lang="en-US" smtClean="0"/>
+              <a:rPr lang="en-US"/>
               <a:t>Click to edit Master text styles</a:t>
             </a:r>
           </a:p>
           <a:p>
             <a:pPr lvl="1"/>
             <a:r>
-              <a:rPr lang="en-US" smtClean="0"/>
+              <a:rPr lang="en-US"/>
               <a:t>Second level</a:t>
             </a:r>
           </a:p>
           <a:p>
             <a:pPr lvl="2"/>
             <a:r>
-              <a:rPr lang="en-US" smtClean="0"/>
+              <a:rPr lang="en-US"/>
               <a:t>Third level</a:t>
             </a:r>
           </a:p>
           <a:p>
             <a:pPr lvl="3"/>
             <a:r>
-              <a:rPr lang="en-US" smtClean="0"/>
+              <a:rPr lang="en-US"/>
               <a:t>Fourth level</a:t>
             </a:r>
           </a:p>
           <a:p>
             <a:pPr lvl="4"/>
             <a:r>
-              <a:rPr lang="en-US" smtClean="0"/>
+              <a:rPr lang="en-US"/>
               <a:t>Fifth level</a:t>
             </a:r>
-            <a:endParaRPr lang="en-US"/>
           </a:p>
         </p:txBody>
       </p:sp>
@@ -1764,7 +1765,7 @@
           <a:p>
             <a:fld id="{5BCAD085-E8A6-8845-BD4E-CB4CCA059FC4}" type="datetimeFigureOut">
               <a:rPr lang="en-US" smtClean="0"/>
-              <a:t>1/27/13</a:t>
+              <a:t>10/29/2026</a:t>
             </a:fld>
             <a:endParaRPr lang="en-US"/>
           </a:p>
@@ -1858,10 +1859,9 @@
           <a:lstStyle/>
           <a:p>
             <a:r>
-              <a:rPr lang="en-US" smtClean="0"/>
+              <a:rPr lang="en-US"/>
               <a:t>Click to edit Master title style</a:t>
             </a:r>
-            <a:endParaRPr lang="en-US"/>
           </a:p>
         </p:txBody>
       </p:sp>
@@ -1882,7 +1882,7 @@
           <a:p>
             <a:fld id="{5BCAD085-E8A6-8845-BD4E-CB4CCA059FC4}" type="datetimeFigureOut">
               <a:rPr lang="en-US" smtClean="0"/>
-              <a:t>1/27/13</a:t>
+              <a:t>10/29/2026</a:t>
             </a:fld>
             <a:endParaRPr lang="en-US"/>
           </a:p>
@@ -1977,7 +1977,7 @@
           <a:p>
             <a:fld id="{5BCAD085-E8A6-8845-BD4E-CB4CCA059FC4}" type="datetimeFigureOut">
               <a:rPr lang="en-US" smtClean="0"/>
-              <a:t>1/27/13</a:t>
+              <a:t>10/29/2026</a:t>
             </a:fld>
             <a:endParaRPr lang="en-US"/>
           </a:p>
@@ -2080,10 +2080,9 @@
           </a:lstStyle>
           <a:p>
             <a:r>
-              <a:rPr lang="en-US" smtClean="0"/>
+              <a:rPr lang="en-US"/>
               <a:t>Click to edit Master title style</a:t>
             </a:r>
-            <a:endParaRPr lang="en-US"/>
           </a:p>
         </p:txBody>
       </p:sp>
@@ -2137,38 +2136,37 @@
           <a:p>
             <a:pPr lvl="0"/>
             <a:r>
-              <a:rPr lang="en-US" smtClean="0"/>
+              <a:rPr lang="en-US"/>
               <a:t>Click to edit Master text styles</a:t>
             </a:r>
           </a:p>
           <a:p>
             <a:pPr lvl="1"/>
             <a:r>
-              <a:rPr lang="en-US" smtClean="0"/>
+              <a:rPr lang="en-US"/>
               <a:t>Second level</a:t>
             </a:r>
           </a:p>
           <a:p>
             <a:pPr lvl="2"/>
             <a:r>
-              <a:rPr lang="en-US" smtClean="0"/>
+              <a:rPr lang="en-US"/>
               <a:t>Third level</a:t>
             </a:r>
           </a:p>
           <a:p>
             <a:pPr lvl="3"/>
             <a:r>
-              <a:rPr lang="en-US" smtClean="0"/>
+              <a:rPr lang="en-US"/>
               <a:t>Fourth level</a:t>
             </a:r>
           </a:p>
           <a:p>
             <a:pPr lvl="4"/>
             <a:r>
-              <a:rPr lang="en-US" smtClean="0"/>
+              <a:rPr lang="en-US"/>
               <a:t>Fifth level</a:t>
             </a:r>
-            <a:endParaRPr lang="en-US"/>
           </a:p>
         </p:txBody>
       </p:sp>
@@ -2231,7 +2229,7 @@
           <a:p>
             <a:pPr lvl="0"/>
             <a:r>
-              <a:rPr lang="en-US" smtClean="0"/>
+              <a:rPr lang="en-US"/>
               <a:t>Click to edit Master text styles</a:t>
             </a:r>
           </a:p>
@@ -2254,7 +2252,7 @@
           <a:p>
             <a:fld id="{5BCAD085-E8A6-8845-BD4E-CB4CCA059FC4}" type="datetimeFigureOut">
               <a:rPr lang="en-US" smtClean="0"/>
-              <a:t>1/27/13</a:t>
+              <a:t>10/29/2026</a:t>
             </a:fld>
             <a:endParaRPr lang="en-US"/>
           </a:p>
@@ -2357,10 +2355,9 @@
           </a:lstStyle>
           <a:p>
             <a:r>
-              <a:rPr lang="en-US" smtClean="0"/>
+              <a:rPr lang="en-US"/>
               <a:t>Click to edit Master title style</a:t>
             </a:r>
-            <a:endParaRPr lang="en-US"/>
           </a:p>
         </p:txBody>
       </p:sp>
@@ -2484,7 +2481,7 @@
           <a:p>
             <a:pPr lvl="0"/>
             <a:r>
-              <a:rPr lang="en-US" smtClean="0"/>
+              <a:rPr lang="en-US"/>
               <a:t>Click to edit Master text styles</a:t>
             </a:r>
           </a:p>
@@ -2507,7 +2504,7 @@
           <a:p>
             <a:fld id="{5BCAD085-E8A6-8845-BD4E-CB4CCA059FC4}" type="datetimeFigureOut">
               <a:rPr lang="en-US" smtClean="0"/>
-              <a:t>1/27/13</a:t>
+              <a:t>10/29/2026</a:t>
             </a:fld>
             <a:endParaRPr lang="en-US"/>
           </a:p>
@@ -2616,10 +2613,9 @@
           <a:lstStyle/>
           <a:p>
             <a:r>
-              <a:rPr lang="en-US" smtClean="0"/>
+              <a:rPr lang="en-US"/>
               <a:t>Click to edit Master title style</a:t>
             </a:r>
-            <a:endParaRPr lang="en-US"/>
           </a:p>
         </p:txBody>
       </p:sp>
@@ -2650,38 +2646,37 @@
           <a:p>
             <a:pPr lvl="0"/>
             <a:r>
-              <a:rPr lang="en-US" smtClean="0"/>
+              <a:rPr lang="en-US"/>
               <a:t>Click to edit Master text styles</a:t>
             </a:r>
           </a:p>
           <a:p>
             <a:pPr lvl="1"/>
             <a:r>
-              <a:rPr lang="en-US" smtClean="0"/>
+              <a:rPr lang="en-US"/>
               <a:t>Second level</a:t>
             </a:r>
           </a:p>
           <a:p>
             <a:pPr lvl="2"/>
             <a:r>
-              <a:rPr lang="en-US" smtClean="0"/>
+              <a:rPr lang="en-US"/>
               <a:t>Third level</a:t>
             </a:r>
           </a:p>
           <a:p>
             <a:pPr lvl="3"/>
             <a:r>
-              <a:rPr lang="en-US" smtClean="0"/>
+              <a:rPr lang="en-US"/>
               <a:t>Fourth level</a:t>
             </a:r>
           </a:p>
           <a:p>
             <a:pPr lvl="4"/>
             <a:r>
-              <a:rPr lang="en-US" smtClean="0"/>
+              <a:rPr lang="en-US"/>
               <a:t>Fifth level</a:t>
             </a:r>
-            <a:endParaRPr lang="en-US"/>
           </a:p>
         </p:txBody>
       </p:sp>
@@ -2720,7 +2715,7 @@
           <a:p>
             <a:fld id="{5BCAD085-E8A6-8845-BD4E-CB4CCA059FC4}" type="datetimeFigureOut">
               <a:rPr lang="en-US" smtClean="0"/>
-              <a:t>1/27/13</a:t>
+              <a:t>10/29/2026</a:t>
             </a:fld>
             <a:endParaRPr lang="en-US"/>
           </a:p>
@@ -3079,7 +3074,7 @@
 </file>
 
 <file path=ppt/slides/slide1.xml><?xml version="1.0" encoding="utf-8"?>
-<p:sld xmlns:a="http://schemas.openxmlformats.org/drawingml/2006/main" xmlns:p="http://schemas.openxmlformats.org/presentationml/2006/main" xmlns:r="http://schemas.openxmlformats.org/officeDocument/2006/relationships">
+<p:sld xmlns:a="http://schemas.openxmlformats.org/drawingml/2006/main" xmlns:r="http://schemas.openxmlformats.org/officeDocument/2006/relationships" xmlns:p="http://schemas.openxmlformats.org/presentationml/2006/main">
   <p:cSld>
     <p:spTree>
       <p:nvGrpSpPr>
@@ -3087,7 +3082,14 @@
         <p:cNvGrpSpPr/>
         <p:nvPr/>
       </p:nvGrpSpPr>
-      <p:grpSpPr/>
+      <p:grpSpPr>
+        <a:xfrm>
+          <a:off x="0" y="0"/>
+          <a:ext cx="0" cy="0"/>
+          <a:chOff x="0" y="0"/>
+          <a:chExt cx="0" cy="0"/>
+        </a:xfrm>
+      </p:grpSpPr>
       <p:sp>
         <p:nvSpPr>
           <p:cNvPr id="2" name="TextBox 1"/>
@@ -3097,7 +3099,7 @@
         <p:spPr>
           <a:xfrm>
             <a:off x="576000" y="360000"/>
-            <a:ext cx="11160000" cy="360000"/>
+            <a:ext cx="11160000" cy="430567"/>
           </a:xfrm>
           <a:prstGeom prst="rect">
             <a:avLst/>
@@ -3105,7 +3107,7 @@
           <a:noFill/>
         </p:spPr>
         <p:txBody>
-          <a:bodyPr wrap="square" anchor="t" lIns="0" rIns="0" tIns="0" bIns="0">
+          <a:bodyPr wrap="square" lIns="0" tIns="0" rIns="0" bIns="0" anchor="t">
             <a:spAutoFit/>
           </a:bodyPr>
           <a:lstStyle/>
@@ -3116,14 +3118,74 @@
               </a:lnSpc>
             </a:pPr>
             <a:r>
-              <a:rPr sz="2500" b="1">
+              <a:rPr sz="2500" b="1" dirty="0" err="1">
                 <a:solidFill>
                   <a:srgbClr val="2B2A28"/>
                 </a:solidFill>
                 <a:latin typeface="맑은 고딕"/>
               </a:rPr>
-              <a:t>엔진 성능을 재는 자 — 바닥과 천장</a:t>
-            </a:r>
+              <a:t>엔진</a:t>
+            </a:r>
+            <a:r>
+              <a:rPr sz="2500" b="1" dirty="0">
+                <a:solidFill>
+                  <a:srgbClr val="2B2A28"/>
+                </a:solidFill>
+                <a:latin typeface="맑은 고딕"/>
+              </a:rPr>
+              <a:t> </a:t>
+            </a:r>
+            <a:r>
+              <a:rPr sz="2500" b="1" dirty="0" err="1">
+                <a:solidFill>
+                  <a:srgbClr val="2B2A28"/>
+                </a:solidFill>
+                <a:latin typeface="맑은 고딕"/>
+              </a:rPr>
+              <a:t>성능</a:t>
+            </a:r>
+            <a:r>
+              <a:rPr lang="en-US" sz="2500" b="1" dirty="0">
+                <a:solidFill>
+                  <a:srgbClr val="2B2A28"/>
+                </a:solidFill>
+                <a:latin typeface="맑은 고딕"/>
+              </a:rPr>
+              <a:t> - </a:t>
+            </a:r>
+            <a:r>
+              <a:rPr sz="2500" b="1" dirty="0" err="1">
+                <a:solidFill>
+                  <a:srgbClr val="2B2A28"/>
+                </a:solidFill>
+                <a:latin typeface="맑은 고딕"/>
+              </a:rPr>
+              <a:t>바닥과</a:t>
+            </a:r>
+            <a:r>
+              <a:rPr sz="2500" b="1" dirty="0">
+                <a:solidFill>
+                  <a:srgbClr val="2B2A28"/>
+                </a:solidFill>
+                <a:latin typeface="맑은 고딕"/>
+              </a:rPr>
+              <a:t> </a:t>
+            </a:r>
+            <a:r>
+              <a:rPr sz="2500" b="1" dirty="0" err="1">
+                <a:solidFill>
+                  <a:srgbClr val="2B2A28"/>
+                </a:solidFill>
+                <a:latin typeface="맑은 고딕"/>
+              </a:rPr>
+              <a:t>천장</a:t>
+            </a:r>
+            <a:endParaRPr sz="2500" b="1" dirty="0">
+              <a:solidFill>
+                <a:srgbClr val="2B2A28"/>
+              </a:solidFill>
+              <a:latin typeface="맑은 고딕"/>
+            </a:endParaRPr>
           </a:p>
         </p:txBody>
       </p:sp>
@@ -3135,7 +3197,7 @@
         </p:nvSpPr>
         <p:spPr>
           <a:xfrm>
-            <a:off x="576000" y="774000"/>
+            <a:off x="576000" y="880153"/>
             <a:ext cx="11160000" cy="288000"/>
           </a:xfrm>
           <a:prstGeom prst="rect">
@@ -3144,7 +3206,7 @@
           <a:noFill/>
         </p:spPr>
         <p:txBody>
-          <a:bodyPr wrap="square" anchor="t" lIns="0" rIns="0" tIns="0" bIns="0">
+          <a:bodyPr wrap="square" lIns="0" tIns="0" rIns="0" bIns="0" anchor="t">
             <a:spAutoFit/>
           </a:bodyPr>
           <a:lstStyle/>
@@ -3155,14 +3217,173 @@
               </a:lnSpc>
             </a:pPr>
             <a:r>
-              <a:rPr sz="1300" b="0">
+              <a:rPr sz="1300" b="0" dirty="0">
                 <a:solidFill>
                   <a:srgbClr val="797672"/>
                 </a:solidFill>
                 <a:latin typeface="맑은 고딕"/>
               </a:rPr>
-              <a:t>S0(앱 화면만 본다)를 0%, UE(모두가 패턴을 안다)를 100% 로 두고  “그 사이 몇 % 를 좁혔나” 로 잰다</a:t>
-            </a:r>
+              <a:t>S0(앱 </a:t>
+            </a:r>
+            <a:r>
+              <a:rPr sz="1300" b="0" dirty="0" err="1">
+                <a:solidFill>
+                  <a:srgbClr val="797672"/>
+                </a:solidFill>
+                <a:latin typeface="맑은 고딕"/>
+              </a:rPr>
+              <a:t>화면만</a:t>
+            </a:r>
+            <a:r>
+              <a:rPr sz="1300" b="0" dirty="0">
+                <a:solidFill>
+                  <a:srgbClr val="797672"/>
+                </a:solidFill>
+                <a:latin typeface="맑은 고딕"/>
+              </a:rPr>
+              <a:t> </a:t>
+            </a:r>
+            <a:r>
+              <a:rPr sz="1300" b="0" dirty="0" err="1">
+                <a:solidFill>
+                  <a:srgbClr val="797672"/>
+                </a:solidFill>
+                <a:latin typeface="맑은 고딕"/>
+              </a:rPr>
+              <a:t>본다</a:t>
+            </a:r>
+            <a:r>
+              <a:rPr sz="1300" b="0" dirty="0">
+                <a:solidFill>
+                  <a:srgbClr val="797672"/>
+                </a:solidFill>
+                <a:latin typeface="맑은 고딕"/>
+              </a:rPr>
+              <a:t>)를 0%, UE(</a:t>
+            </a:r>
+            <a:r>
+              <a:rPr sz="1300" b="0" dirty="0" err="1">
+                <a:solidFill>
+                  <a:srgbClr val="797672"/>
+                </a:solidFill>
+                <a:latin typeface="맑은 고딕"/>
+              </a:rPr>
+              <a:t>모두가</a:t>
+            </a:r>
+            <a:r>
+              <a:rPr sz="1300" b="0" dirty="0">
+                <a:solidFill>
+                  <a:srgbClr val="797672"/>
+                </a:solidFill>
+                <a:latin typeface="맑은 고딕"/>
+              </a:rPr>
+              <a:t> </a:t>
+            </a:r>
+            <a:r>
+              <a:rPr sz="1300" b="0" dirty="0" err="1">
+                <a:solidFill>
+                  <a:srgbClr val="797672"/>
+                </a:solidFill>
+                <a:latin typeface="맑은 고딕"/>
+              </a:rPr>
+              <a:t>패턴을</a:t>
+            </a:r>
+            <a:r>
+              <a:rPr sz="1300" b="0" dirty="0">
+                <a:solidFill>
+                  <a:srgbClr val="797672"/>
+                </a:solidFill>
+                <a:latin typeface="맑은 고딕"/>
+              </a:rPr>
+              <a:t> </a:t>
+            </a:r>
+            <a:r>
+              <a:rPr sz="1300" b="0" dirty="0" err="1">
+                <a:solidFill>
+                  <a:srgbClr val="797672"/>
+                </a:solidFill>
+                <a:latin typeface="맑은 고딕"/>
+              </a:rPr>
+              <a:t>안다</a:t>
+            </a:r>
+            <a:r>
+              <a:rPr sz="1300" b="0" dirty="0">
+                <a:solidFill>
+                  <a:srgbClr val="797672"/>
+                </a:solidFill>
+                <a:latin typeface="맑은 고딕"/>
+              </a:rPr>
+              <a:t>)를 100% 로 </a:t>
+            </a:r>
+            <a:r>
+              <a:rPr sz="1300" b="0" dirty="0" err="1">
+                <a:solidFill>
+                  <a:srgbClr val="797672"/>
+                </a:solidFill>
+                <a:latin typeface="맑은 고딕"/>
+              </a:rPr>
+              <a:t>두고</a:t>
+            </a:r>
+            <a:r>
+              <a:rPr sz="1300" b="0" dirty="0">
+                <a:solidFill>
+                  <a:srgbClr val="797672"/>
+                </a:solidFill>
+                <a:latin typeface="맑은 고딕"/>
+              </a:rPr>
+              <a:t>  “그 </a:t>
+            </a:r>
+            <a:r>
+              <a:rPr sz="1300" b="0" dirty="0" err="1">
+                <a:solidFill>
+                  <a:srgbClr val="797672"/>
+                </a:solidFill>
+                <a:latin typeface="맑은 고딕"/>
+              </a:rPr>
+              <a:t>사이</a:t>
+            </a:r>
+            <a:r>
+              <a:rPr sz="1300" b="0" dirty="0">
+                <a:solidFill>
+                  <a:srgbClr val="797672"/>
+                </a:solidFill>
+                <a:latin typeface="맑은 고딕"/>
+              </a:rPr>
+              <a:t> 몇 % 를 </a:t>
+            </a:r>
+            <a:r>
+              <a:rPr sz="1300" b="0" dirty="0" err="1">
+                <a:solidFill>
+                  <a:srgbClr val="797672"/>
+                </a:solidFill>
+                <a:latin typeface="맑은 고딕"/>
+              </a:rPr>
+              <a:t>좁혔나</a:t>
+            </a:r>
+            <a:r>
+              <a:rPr sz="1300" b="0" dirty="0">
+                <a:solidFill>
+                  <a:srgbClr val="797672"/>
+                </a:solidFill>
+                <a:latin typeface="맑은 고딕"/>
+              </a:rPr>
+              <a:t>” 로 </a:t>
+            </a:r>
+            <a:r>
+              <a:rPr sz="1300" b="0" dirty="0" err="1">
+                <a:solidFill>
+                  <a:srgbClr val="797672"/>
+                </a:solidFill>
+                <a:latin typeface="맑은 고딕"/>
+              </a:rPr>
+              <a:t>잰다</a:t>
+            </a:r>
+            <a:endParaRPr sz="1300" b="0" dirty="0">
+              <a:solidFill>
+                <a:srgbClr val="797672"/>
+              </a:solidFill>
+              <a:latin typeface="맑은 고딕"/>
+            </a:endParaRPr>
           </a:p>
         </p:txBody>
       </p:sp>
@@ -3218,7 +3439,7 @@
           <a:noFill/>
         </p:spPr>
         <p:txBody>
-          <a:bodyPr wrap="square" anchor="t" lIns="0" rIns="0" tIns="0" bIns="0">
+          <a:bodyPr wrap="square" lIns="0" tIns="0" rIns="0" bIns="0" anchor="t">
             <a:spAutoFit/>
           </a:bodyPr>
           <a:lstStyle/>
@@ -3283,6 +3504,7 @@
           <a:lstStyle/>
           <a:p>
             <a:pPr algn="ctr"/>
+            <a:endParaRPr/>
           </a:p>
         </p:txBody>
       </p:sp>
@@ -3303,7 +3525,7 @@
           <a:noFill/>
         </p:spPr>
         <p:txBody>
-          <a:bodyPr wrap="square" anchor="t" lIns="0" rIns="0" tIns="0" bIns="0">
+          <a:bodyPr wrap="square" lIns="0" tIns="0" rIns="0" bIns="0" anchor="t">
             <a:spAutoFit/>
           </a:bodyPr>
           <a:lstStyle/>
@@ -3342,7 +3564,7 @@
           <a:noFill/>
         </p:spPr>
         <p:txBody>
-          <a:bodyPr wrap="square" anchor="t" lIns="0" rIns="0" tIns="0" bIns="0">
+          <a:bodyPr wrap="square" lIns="0" tIns="0" rIns="0" bIns="0" anchor="t">
             <a:spAutoFit/>
           </a:bodyPr>
           <a:lstStyle/>
@@ -3381,7 +3603,7 @@
           <a:noFill/>
         </p:spPr>
         <p:txBody>
-          <a:bodyPr wrap="square" anchor="t" lIns="0" rIns="0" tIns="0" bIns="0">
+          <a:bodyPr wrap="square" lIns="0" tIns="0" rIns="0" bIns="0" anchor="t">
             <a:spAutoFit/>
           </a:bodyPr>
           <a:lstStyle/>
@@ -3420,7 +3642,7 @@
           <a:noFill/>
         </p:spPr>
         <p:txBody>
-          <a:bodyPr wrap="square" anchor="t" lIns="0" rIns="0" tIns="0" bIns="0">
+          <a:bodyPr wrap="square" lIns="0" tIns="0" rIns="0" bIns="0" anchor="t">
             <a:spAutoFit/>
           </a:bodyPr>
           <a:lstStyle/>
@@ -3485,6 +3707,7 @@
           <a:lstStyle/>
           <a:p>
             <a:pPr algn="ctr"/>
+            <a:endParaRPr/>
           </a:p>
         </p:txBody>
       </p:sp>
@@ -3531,6 +3754,7 @@
           <a:lstStyle/>
           <a:p>
             <a:pPr algn="ctr"/>
+            <a:endParaRPr/>
           </a:p>
         </p:txBody>
       </p:sp>
@@ -3551,7 +3775,7 @@
           <a:noFill/>
         </p:spPr>
         <p:txBody>
-          <a:bodyPr wrap="square" anchor="t" lIns="0" rIns="0" tIns="0" bIns="0">
+          <a:bodyPr wrap="square" lIns="0" tIns="0" rIns="0" bIns="0" anchor="t">
             <a:spAutoFit/>
           </a:bodyPr>
           <a:lstStyle/>
@@ -3590,7 +3814,7 @@
           <a:noFill/>
         </p:spPr>
         <p:txBody>
-          <a:bodyPr wrap="square" anchor="t" lIns="0" rIns="0" tIns="0" bIns="0">
+          <a:bodyPr wrap="square" lIns="0" tIns="0" rIns="0" bIns="0" anchor="t">
             <a:spAutoFit/>
           </a:bodyPr>
           <a:lstStyle/>
@@ -3629,7 +3853,7 @@
           <a:noFill/>
         </p:spPr>
         <p:txBody>
-          <a:bodyPr wrap="square" anchor="t" lIns="0" rIns="0" tIns="0" bIns="0">
+          <a:bodyPr wrap="square" lIns="0" tIns="0" rIns="0" bIns="0" anchor="t">
             <a:spAutoFit/>
           </a:bodyPr>
           <a:lstStyle/>
@@ -3668,7 +3892,7 @@
           <a:noFill/>
         </p:spPr>
         <p:txBody>
-          <a:bodyPr wrap="square" anchor="t" lIns="0" rIns="0" tIns="0" bIns="0">
+          <a:bodyPr wrap="square" lIns="0" tIns="0" rIns="0" bIns="0" anchor="t">
             <a:spAutoFit/>
           </a:bodyPr>
           <a:lstStyle/>
@@ -3733,6 +3957,7 @@
           <a:lstStyle/>
           <a:p>
             <a:pPr algn="ctr"/>
+            <a:endParaRPr/>
           </a:p>
         </p:txBody>
       </p:sp>
@@ -3779,6 +4004,7 @@
           <a:lstStyle/>
           <a:p>
             <a:pPr algn="ctr"/>
+            <a:endParaRPr/>
           </a:p>
         </p:txBody>
       </p:sp>
@@ -3799,7 +4025,7 @@
           <a:noFill/>
         </p:spPr>
         <p:txBody>
-          <a:bodyPr wrap="square" anchor="t" lIns="0" rIns="0" tIns="0" bIns="0">
+          <a:bodyPr wrap="square" lIns="0" tIns="0" rIns="0" bIns="0" anchor="t">
             <a:spAutoFit/>
           </a:bodyPr>
           <a:lstStyle/>
@@ -3838,7 +4064,7 @@
           <a:noFill/>
         </p:spPr>
         <p:txBody>
-          <a:bodyPr wrap="square" anchor="t" lIns="0" rIns="0" tIns="0" bIns="0">
+          <a:bodyPr wrap="square" lIns="0" tIns="0" rIns="0" bIns="0" anchor="t">
             <a:spAutoFit/>
           </a:bodyPr>
           <a:lstStyle/>
@@ -3877,7 +4103,7 @@
           <a:noFill/>
         </p:spPr>
         <p:txBody>
-          <a:bodyPr wrap="square" anchor="t" lIns="0" rIns="0" tIns="0" bIns="0">
+          <a:bodyPr wrap="square" lIns="0" tIns="0" rIns="0" bIns="0" anchor="t">
             <a:spAutoFit/>
           </a:bodyPr>
           <a:lstStyle/>
@@ -3916,7 +4142,7 @@
           <a:noFill/>
         </p:spPr>
         <p:txBody>
-          <a:bodyPr wrap="square" anchor="t" lIns="0" rIns="0" tIns="0" bIns="0">
+          <a:bodyPr wrap="square" lIns="0" tIns="0" rIns="0" bIns="0" anchor="t">
             <a:spAutoFit/>
           </a:bodyPr>
           <a:lstStyle/>
@@ -3981,6 +4207,7 @@
           <a:lstStyle/>
           <a:p>
             <a:pPr algn="ctr"/>
+            <a:endParaRPr/>
           </a:p>
         </p:txBody>
       </p:sp>
@@ -4027,6 +4254,7 @@
           <a:lstStyle/>
           <a:p>
             <a:pPr algn="ctr"/>
+            <a:endParaRPr/>
           </a:p>
         </p:txBody>
       </p:sp>
@@ -4047,7 +4275,7 @@
           <a:noFill/>
         </p:spPr>
         <p:txBody>
-          <a:bodyPr wrap="square" anchor="t" lIns="0" rIns="0" tIns="0" bIns="0">
+          <a:bodyPr wrap="square" lIns="0" tIns="0" rIns="0" bIns="0" anchor="t">
             <a:spAutoFit/>
           </a:bodyPr>
           <a:lstStyle/>
@@ -4086,7 +4314,7 @@
           <a:noFill/>
         </p:spPr>
         <p:txBody>
-          <a:bodyPr wrap="square" anchor="t" lIns="0" rIns="0" tIns="0" bIns="0">
+          <a:bodyPr wrap="square" lIns="0" tIns="0" rIns="0" bIns="0" anchor="t">
             <a:spAutoFit/>
           </a:bodyPr>
           <a:lstStyle/>
@@ -4125,7 +4353,7 @@
           <a:noFill/>
         </p:spPr>
         <p:txBody>
-          <a:bodyPr wrap="square" anchor="t" lIns="0" rIns="0" tIns="0" bIns="0">
+          <a:bodyPr wrap="square" lIns="0" tIns="0" rIns="0" bIns="0" anchor="t">
             <a:spAutoFit/>
           </a:bodyPr>
           <a:lstStyle/>
@@ -4164,7 +4392,7 @@
           <a:noFill/>
         </p:spPr>
         <p:txBody>
-          <a:bodyPr wrap="square" anchor="t" lIns="0" rIns="0" tIns="0" bIns="0">
+          <a:bodyPr wrap="square" lIns="0" tIns="0" rIns="0" bIns="0" anchor="t">
             <a:spAutoFit/>
           </a:bodyPr>
           <a:lstStyle/>
@@ -4229,6 +4457,7 @@
           <a:lstStyle/>
           <a:p>
             <a:pPr algn="ctr"/>
+            <a:endParaRPr/>
           </a:p>
         </p:txBody>
       </p:sp>
@@ -4276,6 +4505,7 @@
           <a:lstStyle/>
           <a:p>
             <a:pPr algn="ctr"/>
+            <a:endParaRPr/>
           </a:p>
         </p:txBody>
       </p:sp>
@@ -4296,7 +4526,7 @@
           <a:noFill/>
         </p:spPr>
         <p:txBody>
-          <a:bodyPr wrap="square" anchor="t" lIns="0" rIns="0" tIns="0" bIns="0">
+          <a:bodyPr wrap="square" lIns="0" tIns="0" rIns="0" bIns="0" anchor="t">
             <a:spAutoFit/>
           </a:bodyPr>
           <a:lstStyle/>
@@ -4335,7 +4565,7 @@
           <a:noFill/>
         </p:spPr>
         <p:txBody>
-          <a:bodyPr wrap="square" anchor="t" lIns="0" rIns="0" tIns="0" bIns="0">
+          <a:bodyPr wrap="square" lIns="0" tIns="0" rIns="0" bIns="0" anchor="t">
             <a:spAutoFit/>
           </a:bodyPr>
           <a:lstStyle/>
@@ -4374,7 +4604,7 @@
           <a:noFill/>
         </p:spPr>
         <p:txBody>
-          <a:bodyPr wrap="square" anchor="t" lIns="0" rIns="0" tIns="0" bIns="0">
+          <a:bodyPr wrap="square" lIns="0" tIns="0" rIns="0" bIns="0" anchor="t">
             <a:spAutoFit/>
           </a:bodyPr>
           <a:lstStyle/>
@@ -4413,7 +4643,7 @@
           <a:noFill/>
         </p:spPr>
         <p:txBody>
-          <a:bodyPr wrap="square" anchor="t" lIns="0" rIns="0" tIns="0" bIns="0">
+          <a:bodyPr wrap="square" lIns="0" tIns="0" rIns="0" bIns="0" anchor="t">
             <a:spAutoFit/>
           </a:bodyPr>
           <a:lstStyle/>
@@ -4478,6 +4708,7 @@
           <a:lstStyle/>
           <a:p>
             <a:pPr algn="ctr"/>
+            <a:endParaRPr/>
           </a:p>
         </p:txBody>
       </p:sp>
@@ -4526,6 +4757,7 @@
           <a:lstStyle/>
           <a:p>
             <a:pPr algn="ctr"/>
+            <a:endParaRPr/>
           </a:p>
         </p:txBody>
       </p:sp>
@@ -4546,7 +4778,7 @@
           <a:noFill/>
         </p:spPr>
         <p:txBody>
-          <a:bodyPr wrap="square" anchor="t" lIns="0" rIns="0" tIns="0" bIns="0">
+          <a:bodyPr wrap="square" lIns="0" tIns="0" rIns="0" bIns="0" anchor="t">
             <a:spAutoFit/>
           </a:bodyPr>
           <a:lstStyle/>
@@ -4585,7 +4817,7 @@
           <a:noFill/>
         </p:spPr>
         <p:txBody>
-          <a:bodyPr wrap="square" anchor="t" lIns="0" rIns="0" tIns="0" bIns="0">
+          <a:bodyPr wrap="square" lIns="0" tIns="0" rIns="0" bIns="0" anchor="t">
             <a:spAutoFit/>
           </a:bodyPr>
           <a:lstStyle/>
@@ -4624,7 +4856,7 @@
           <a:noFill/>
         </p:spPr>
         <p:txBody>
-          <a:bodyPr wrap="square" anchor="t" lIns="0" rIns="0" tIns="0" bIns="0">
+          <a:bodyPr wrap="square" lIns="0" tIns="0" rIns="0" bIns="0" anchor="t">
             <a:spAutoFit/>
           </a:bodyPr>
           <a:lstStyle/>
@@ -4655,7 +4887,7 @@
         <p:spPr>
           <a:xfrm>
             <a:off x="576000" y="5497200"/>
-            <a:ext cx="36000" cy="792000"/>
+            <a:ext cx="61588" cy="305066"/>
           </a:xfrm>
           <a:prstGeom prst="rect">
             <a:avLst/>
@@ -4687,6 +4919,7 @@
           <a:lstStyle/>
           <a:p>
             <a:pPr algn="ctr"/>
+            <a:endParaRPr/>
           </a:p>
         </p:txBody>
       </p:sp>
@@ -4699,7 +4932,7 @@
         <p:spPr>
           <a:xfrm>
             <a:off x="756000" y="5515200"/>
-            <a:ext cx="10800000" cy="792000"/>
+            <a:ext cx="10800000" cy="287066"/>
           </a:xfrm>
           <a:prstGeom prst="rect">
             <a:avLst/>
@@ -4707,7 +4940,7 @@
           <a:noFill/>
         </p:spPr>
         <p:txBody>
-          <a:bodyPr wrap="square" anchor="t" lIns="0" rIns="0" tIns="0" bIns="0">
+          <a:bodyPr wrap="square" lIns="0" tIns="0" rIns="0" bIns="0" anchor="t">
             <a:spAutoFit/>
           </a:bodyPr>
           <a:lstStyle/>
@@ -4718,69 +4951,164 @@
               </a:lnSpc>
             </a:pPr>
             <a:r>
-              <a:rPr sz="1350" b="1">
+              <a:rPr sz="1350" b="1" dirty="0" err="1">
                 <a:solidFill>
                   <a:srgbClr val="2B2A28"/>
                 </a:solidFill>
                 <a:latin typeface="맑은 고딕"/>
               </a:rPr>
-              <a:t>완전예측이 27.5% 에서 멈춘다  →  남은 72.5%p 는 정보로 못 메운다</a:t>
-            </a:r>
-          </a:p>
-          <a:p>
-            <a:pPr algn="l">
-              <a:lnSpc>
-                <a:spcPct val="160000"/>
-              </a:lnSpc>
-            </a:pPr>
-            <a:r>
-              <a:rPr sz="1350" b="1">
+              <a:t>우리는</a:t>
+            </a:r>
+            <a:r>
+              <a:rPr sz="1350" b="1" dirty="0">
                 <a:solidFill>
                   <a:srgbClr val="2B2A28"/>
                 </a:solidFill>
                 <a:latin typeface="맑은 고딕"/>
               </a:rPr>
-              <a:t>우리는 “얼마나 개선했나” 가 아니라 “무엇으로는 개선할 수 없는가” 를 숫자로 갈랐다</a:t>
-            </a:r>
-          </a:p>
-        </p:txBody>
-      </p:sp>
-      <p:sp>
-        <p:nvSpPr>
-          <p:cNvPr id="42" name="TextBox 41"/>
-          <p:cNvSpPr txBox="1"/>
-          <p:nvPr/>
-        </p:nvSpPr>
-        <p:spPr>
-          <a:xfrm>
-            <a:off x="576000" y="6372000"/>
-            <a:ext cx="11160000" cy="288000"/>
-          </a:xfrm>
-          <a:prstGeom prst="rect">
-            <a:avLst/>
-          </a:prstGeom>
-          <a:noFill/>
-        </p:spPr>
-        <p:txBody>
-          <a:bodyPr wrap="square" anchor="t" lIns="0" rIns="0" tIns="0" bIns="0">
-            <a:spAutoFit/>
-          </a:bodyPr>
-          <a:lstStyle/>
-          <a:p>
-            <a:pPr algn="l">
-              <a:lnSpc>
-                <a:spcPct val="125000"/>
-              </a:lnSpc>
-            </a:pPr>
-            <a:r>
-              <a:rPr sz="950" b="0">
-                <a:solidFill>
-                  <a:srgbClr val="797672"/>
-                </a:solidFill>
-                <a:latin typeface="맑은 고딕"/>
-              </a:rPr>
-              <a:t>상행 adoption 시나리오 · 공통 시드 14개 · 대응비교 · 이탈 맞춤   |   총 사회적 비용 = 총 체류 + 이탈 × 120분</a:t>
-            </a:r>
+              <a:t> “</a:t>
+            </a:r>
+            <a:r>
+              <a:rPr sz="1350" b="1" dirty="0" err="1">
+                <a:solidFill>
+                  <a:srgbClr val="2B2A28"/>
+                </a:solidFill>
+                <a:latin typeface="맑은 고딕"/>
+              </a:rPr>
+              <a:t>얼마나</a:t>
+            </a:r>
+            <a:r>
+              <a:rPr sz="1350" b="1" dirty="0">
+                <a:solidFill>
+                  <a:srgbClr val="2B2A28"/>
+                </a:solidFill>
+                <a:latin typeface="맑은 고딕"/>
+              </a:rPr>
+              <a:t> </a:t>
+            </a:r>
+            <a:r>
+              <a:rPr sz="1350" b="1" dirty="0" err="1">
+                <a:solidFill>
+                  <a:srgbClr val="2B2A28"/>
+                </a:solidFill>
+                <a:latin typeface="맑은 고딕"/>
+              </a:rPr>
+              <a:t>개선했나</a:t>
+            </a:r>
+            <a:r>
+              <a:rPr sz="1350" b="1" dirty="0">
+                <a:solidFill>
+                  <a:srgbClr val="2B2A28"/>
+                </a:solidFill>
+                <a:latin typeface="맑은 고딕"/>
+              </a:rPr>
+              <a:t>” 가 </a:t>
+            </a:r>
+            <a:r>
+              <a:rPr sz="1350" b="1" dirty="0" err="1">
+                <a:solidFill>
+                  <a:srgbClr val="2B2A28"/>
+                </a:solidFill>
+                <a:latin typeface="맑은 고딕"/>
+              </a:rPr>
+              <a:t>아니라</a:t>
+            </a:r>
+            <a:r>
+              <a:rPr sz="1350" b="1" dirty="0">
+                <a:solidFill>
+                  <a:srgbClr val="2B2A28"/>
+                </a:solidFill>
+                <a:latin typeface="맑은 고딕"/>
+              </a:rPr>
+              <a:t> “</a:t>
+            </a:r>
+            <a:r>
+              <a:rPr sz="1350" b="1" dirty="0" err="1">
+                <a:solidFill>
+                  <a:srgbClr val="2B2A28"/>
+                </a:solidFill>
+                <a:latin typeface="맑은 고딕"/>
+              </a:rPr>
+              <a:t>무엇으로는</a:t>
+            </a:r>
+            <a:r>
+              <a:rPr sz="1350" b="1" dirty="0">
+                <a:solidFill>
+                  <a:srgbClr val="2B2A28"/>
+                </a:solidFill>
+                <a:latin typeface="맑은 고딕"/>
+              </a:rPr>
+              <a:t> </a:t>
+            </a:r>
+            <a:r>
+              <a:rPr sz="1350" b="1" dirty="0" err="1">
+                <a:solidFill>
+                  <a:srgbClr val="2B2A28"/>
+                </a:solidFill>
+                <a:latin typeface="맑은 고딕"/>
+              </a:rPr>
+              <a:t>개선할</a:t>
+            </a:r>
+            <a:r>
+              <a:rPr sz="1350" b="1" dirty="0">
+                <a:solidFill>
+                  <a:srgbClr val="2B2A28"/>
+                </a:solidFill>
+                <a:latin typeface="맑은 고딕"/>
+              </a:rPr>
+              <a:t> 수 </a:t>
+            </a:r>
+            <a:r>
+              <a:rPr sz="1350" b="1" dirty="0" err="1">
+                <a:solidFill>
+                  <a:srgbClr val="2B2A28"/>
+                </a:solidFill>
+                <a:latin typeface="맑은 고딕"/>
+              </a:rPr>
+              <a:t>없는가</a:t>
+            </a:r>
+            <a:r>
+              <a:rPr sz="1350" b="1" dirty="0">
+                <a:solidFill>
+                  <a:srgbClr val="2B2A28"/>
+                </a:solidFill>
+                <a:latin typeface="맑은 고딕"/>
+              </a:rPr>
+              <a:t>” 를 </a:t>
+            </a:r>
+            <a:r>
+              <a:rPr sz="1350" b="1" dirty="0" err="1">
+                <a:solidFill>
+                  <a:srgbClr val="2B2A28"/>
+                </a:solidFill>
+                <a:latin typeface="맑은 고딕"/>
+              </a:rPr>
+              <a:t>숫자로</a:t>
+            </a:r>
+            <a:r>
+              <a:rPr sz="1350" b="1" dirty="0">
+                <a:solidFill>
+                  <a:srgbClr val="2B2A28"/>
+                </a:solidFill>
+                <a:latin typeface="맑은 고딕"/>
+              </a:rPr>
+              <a:t> </a:t>
+            </a:r>
+            <a:r>
+              <a:rPr sz="1350" b="1" dirty="0" err="1">
+                <a:solidFill>
+                  <a:srgbClr val="2B2A28"/>
+                </a:solidFill>
+                <a:latin typeface="맑은 고딕"/>
+              </a:rPr>
+              <a:t>갈랐다</a:t>
+            </a:r>
+            <a:endParaRPr sz="1350" b="1" dirty="0">
+              <a:solidFill>
+                <a:srgbClr val="2B2A28"/>
+              </a:solidFill>
+              <a:latin typeface="맑은 고딕"/>
+            </a:endParaRPr>
           </a:p>
         </p:txBody>
       </p:sp>
